--- a/decks/triple-electromagnetism/triple-electromagnetism_ch6_transformers.pptx
+++ b/decks/triple-electromagnetism/triple-electromagnetism_ch6_transformers.pptx
@@ -125,30 +125,30 @@
   <p:extLst>
     <p:ext uri="{521415D9-36F7-43E2-AB2F-B90AF26B5E84}">
       <p14:sectionLst xmlns:p14="http://schemas.microsoft.com/office/powerpoint/2010/main">
-        <p14:section name="Opening" id="{a5688e3d-7723-7525-b78b-d48af64a43bd}">
+        <p14:section name="Opening" id="{625d9780-3d27-3d1d-5313-3c40a292b714}">
           <p14:sldIdLst>
             <p14:sldId id="256"/>
           </p14:sldIdLst>
         </p14:section>
-        <p14:section name="Gate" id="{fe528092-6312-0b8a-a9f2-aaf52c6e28a5}">
+        <p14:section name="Gate" id="{a0fdfacb-3ae8-4026-305b-082e23d41ba7}">
           <p14:sldIdLst>
             <p14:sldId id="257"/>
             <p14:sldId id="258"/>
           </p14:sldIdLst>
         </p14:section>
-        <p14:section name="Pre-teach" id="{3b350932-6958-327c-1b0c-26bde033526e}">
+        <p14:section name="Pre-teach" id="{773705f3-ba5d-7e6b-693f-087c311525a1}">
           <p14:sldIdLst>
             <p14:sldId id="259"/>
             <p14:sldId id="260"/>
           </p14:sldIdLst>
         </p14:section>
-        <p14:section name="Read-along" id="{047f317c-3b7a-40c3-77d3-0c7693f746a4}">
+        <p14:section name="Read-along" id="{49a7e191-3b62-9d96-155b-fe780e46bc0d}">
           <p14:sldIdLst>
             <p14:sldId id="261"/>
             <p14:sldId id="262"/>
           </p14:sldIdLst>
         </p14:section>
-        <p14:section name="Teach" id="{6b9bc77c-9db5-2bf8-47b3-64a61f6b0b88}">
+        <p14:section name="Teach" id="{44a0df74-d619-e3ba-4166-42c5be2b6f14}">
           <p14:sldIdLst>
             <p14:sldId id="263"/>
             <p14:sldId id="264"/>
@@ -158,18 +158,18 @@
             <p14:sldId id="268"/>
           </p14:sldIdLst>
         </p14:section>
-        <p14:section name="Routes" id="{f1f6ea33-2a16-1983-014a-5ee147586b54}">
+        <p14:section name="Routes" id="{ac6c4865-54c6-ba89-4410-c883987929fd}">
           <p14:sldIdLst>
             <p14:sldId id="269"/>
             <p14:sldId id="270"/>
           </p14:sldIdLst>
         </p14:section>
-        <p14:section name="Close" id="{1e492f41-c769-8e57-b763-e88cc1e51256}">
+        <p14:section name="Close" id="{2af89900-7ae9-ed75-b224-06f9bd92d741}">
           <p14:sldIdLst>
             <p14:sldId id="271"/>
           </p14:sldIdLst>
         </p14:section>
-        <p14:section name="Answers" id="{978fd123-9ff5-6a90-04d6-71d4488b3b73}">
+        <p14:section name="Answers" id="{c8f2d333-0868-1bbf-3543-d003f4e4f5e8}">
           <p14:sldIdLst>
             <p14:sldId id="272"/>
             <p14:sldId id="273"/>
@@ -1231,7 +1231,7 @@
               <a:rPr lang="en-US" dirty="0"/>
               <a:t>Exit ticket — individual, silent, on a slip or mini-whiteboard. Recall before help: no notes, no lanes, no hints. Collect before pupils leave.
 Question: Why does a transformer only work with an alternating current?
-Answer: D   Only a changing current gives a changing magnetic field, and only a changing field induces a p.d. in the secondary coil. Induction needs a changing field. A steady d.c. gives a steady field and induces nothing after the first instant.
+Answer: B   Only a changing current gives a changing magnetic field, and only a changing field induces a p.d. in the secondary coil. Induction needs a changing field. A steady d.c. gives a steady field and induces nothing after the first instant.
 Source of this question: gate item 1 re-asked (options rotated) — this chapter has no third quick-check module.
 The ebook also holds task 3, "Why so high? (6 marks)", for homework or the next lesson's do now.
 Sort the slips: correct → ready to move on; incorrect → start next lesson in the pre-teach group, with the read-along and the Support lane. Same destination next time.</a:t>
@@ -1505,7 +1505,7 @@
             <a:r>
               <a:rPr lang="en-US" dirty="0"/>
               <a:t>Answers — exit ticket: Exit ticket. Reveal the answer; pupils mark their own work in a different colour, then read the "why" together. Same destination for every lane, so one answer serves the whole class.
-Answer: D   Only a changing current gives a changing magnetic field, and only a changing field induces a p.d. in the secondary coil
+Answer: B   Only a changing current gives a changing magnetic field, and only a changing field induces a p.d. in the secondary coil
 Why: Induction needs a changing field. A steady d.c. gives a steady field and induces nothing after the first instant.
 Ask a Support pupil to explain one step, and a Stretch pupil to share their extension.</a:t>
             </a:r>
@@ -1596,7 +1596,7 @@
             <a:r>
               <a:rPr lang="en-US" dirty="0"/>
               <a:t>Do now — retrieval. Silent, no notes, no help: recall comes before any support. Give about four minutes.
-1. Why does a transformer only work with an alternating current?  →  A   Only a changing current gives a changing magnetic field, and only a changing field induces a p.d. in the secondary coil
+1. Why does a transformer only work with an alternating current?  →  C   Only a changing current gives a changing magnetic field, and only a changing field induces a p.d. in the secondary coil
 2. A transformer is 100 % efficient. The primary coil takes 230 V at a current of 0.5 A. The secondary coil gives 11.5 V. Calculate the current in the secondary coil in amperes.  →  10 A
 3. In a step-up transformer the secondary coil has ___ turns than the primary coil.  →  more
 Circulate: who gets 3/3 (Stretch route), 2/3 (Core), 0–1 (Support)? Use this to route pupils later in the lesson.</a:t>
@@ -1688,7 +1688,7 @@
             <a:r>
               <a:rPr lang="en-US" dirty="0"/>
               <a:t>Answers — pupils mark their own in a different colour, then hands up for 3/3, 2/3, 1/3.
-1. A   Only a changing current gives a changing magnetic field, and only a changing field induces a p.d. in the secondary coil. Induction needs a changing field. A steady d.c. gives a steady field and induces nothing after the first instant.
+1. C   Only a changing current gives a changing magnetic field, and only a changing field induces a p.d. in the secondary coil. Induction needs a changing field. A steady d.c. gives a steady field and induces nothing after the first instant.
 2. 10 A. Vp Ip = Vs Is, so Is = 230 × 0.5 ÷ 11.5 = 10 A (exact). The p.d. fell 20 times, so the current rose 20 times.
 3. more. Vp / Vs = np / ns: a bigger Vs needs a bigger ns.
 Say the route each score points to: 3/3 Stretch, 2/3 Core, 0–1 Support. Pupils may choose to move up.</a:t>
@@ -9392,7 +9392,7 @@
                 <a:ea typeface="Calibri" pitchFamily="34" charset="-122"/>
                 <a:cs typeface="Calibri" pitchFamily="34" charset="-120"/>
               </a:rPr>
-              <a:t>Direct current cannot flow through an iron core</a:t>
+              <a:t>Alternating current is stronger than direct current</a:t>
             </a:r>
             <a:endParaRPr lang="en-US" sz="2400" dirty="0"/>
           </a:p>
@@ -9429,7 +9429,7 @@
                 <a:ea typeface="Calibri" pitchFamily="34" charset="-122"/>
                 <a:cs typeface="Calibri" pitchFamily="34" charset="-120"/>
               </a:rPr>
-              <a:t>Alternating current is stronger than direct current</a:t>
+              <a:t>Only a changing current gives a changing magnetic field, and only a changing field induces a p.d. in the secondary coil</a:t>
             </a:r>
             <a:endParaRPr lang="en-US" sz="2400" dirty="0"/>
           </a:p>
@@ -9503,7 +9503,7 @@
                 <a:ea typeface="Calibri" pitchFamily="34" charset="-122"/>
                 <a:cs typeface="Calibri" pitchFamily="34" charset="-120"/>
               </a:rPr>
-              <a:t>Only a changing current gives a changing magnetic field, and only a changing field induces a p.d. in the secondary coil</a:t>
+              <a:t>Direct current cannot flow through an iron core</a:t>
             </a:r>
             <a:endParaRPr lang="en-US" sz="2400" dirty="0"/>
           </a:p>
@@ -10826,7 +10826,7 @@
                 <a:ea typeface="Cambria" pitchFamily="34" charset="-122"/>
                 <a:cs typeface="Cambria" pitchFamily="34" charset="-120"/>
               </a:rPr>
-              <a:t>D   Only a changing current gives a changing magnetic field, and only a changing field induces a p.d. in the secondary coil</a:t>
+              <a:t>B   Only a changing current gives a changing magnetic field, and only a changing field induces a p.d. in the secondary coil</a:t>
             </a:r>
             <a:endParaRPr lang="en-US" sz="1800" dirty="0"/>
           </a:p>
@@ -11360,7 +11360,7 @@
                 <a:ea typeface="Calibri" pitchFamily="34" charset="-122"/>
                 <a:cs typeface="Calibri" pitchFamily="34" charset="-120"/>
               </a:rPr>
-              <a:t>Only a changing current gives a changing magnetic field, and only a changing field induces a p.d. in the secondary coil</a:t>
+              <a:t>Direct current cannot flow through an iron core</a:t>
             </a:r>
             <a:endParaRPr lang="en-US" sz="1800" dirty="0"/>
           </a:p>
@@ -11397,7 +11397,7 @@
                 <a:ea typeface="Calibri" pitchFamily="34" charset="-122"/>
                 <a:cs typeface="Calibri" pitchFamily="34" charset="-120"/>
               </a:rPr>
-              <a:t>Direct current cannot flow through an iron core</a:t>
+              <a:t>Alternating current is stronger than direct current</a:t>
             </a:r>
             <a:endParaRPr lang="en-US" sz="1800" dirty="0"/>
           </a:p>
@@ -11434,7 +11434,7 @@
                 <a:ea typeface="Calibri" pitchFamily="34" charset="-122"/>
                 <a:cs typeface="Calibri" pitchFamily="34" charset="-120"/>
               </a:rPr>
-              <a:t>Alternating current is stronger than direct current</a:t>
+              <a:t>Only a changing current gives a changing magnetic field, and only a changing field induces a p.d. in the secondary coil</a:t>
             </a:r>
             <a:endParaRPr lang="en-US" sz="1800" dirty="0"/>
           </a:p>
@@ -12268,7 +12268,7 @@
                 <a:ea typeface="Calibri" pitchFamily="34" charset="-122"/>
                 <a:cs typeface="Calibri" pitchFamily="34" charset="-120"/>
               </a:rPr>
-              <a:t>A   Only a changing current gives a changing magnetic field, and only a changing field induces a p.d. in the secondary coil</a:t>
+              <a:t>C   Only a changing current gives a changing magnetic field, and only a changing field induces a p.d. in the secondary coil</a:t>
             </a:r>
             <a:endParaRPr lang="en-US" sz="2200" dirty="0"/>
           </a:p>

--- a/decks/triple-electromagnetism/triple-electromagnetism_ch6_transformers.pptx
+++ b/decks/triple-electromagnetism/triple-electromagnetism_ch6_transformers.pptx
@@ -125,30 +125,30 @@
   <p:extLst>
     <p:ext uri="{521415D9-36F7-43E2-AB2F-B90AF26B5E84}">
       <p14:sectionLst xmlns:p14="http://schemas.microsoft.com/office/powerpoint/2010/main">
-        <p14:section name="Opening" id="{625d9780-3d27-3d1d-5313-3c40a292b714}">
+        <p14:section name="Opening" id="{7cd20be1-9265-b260-6eed-ba80d8b836a3}">
           <p14:sldIdLst>
             <p14:sldId id="256"/>
           </p14:sldIdLst>
         </p14:section>
-        <p14:section name="Gate" id="{a0fdfacb-3ae8-4026-305b-082e23d41ba7}">
+        <p14:section name="Gate" id="{a6b60db2-0c8c-09f4-a686-d5ce18c9113a}">
           <p14:sldIdLst>
             <p14:sldId id="257"/>
             <p14:sldId id="258"/>
           </p14:sldIdLst>
         </p14:section>
-        <p14:section name="Pre-teach" id="{773705f3-ba5d-7e6b-693f-087c311525a1}">
+        <p14:section name="Pre-teach" id="{10c921d9-6866-09f6-b4b6-76211977eb56}">
           <p14:sldIdLst>
             <p14:sldId id="259"/>
             <p14:sldId id="260"/>
           </p14:sldIdLst>
         </p14:section>
-        <p14:section name="Read-along" id="{49a7e191-3b62-9d96-155b-fe780e46bc0d}">
+        <p14:section name="Read-along" id="{c37c7109-3779-af5c-7b1a-fab643ac0650}">
           <p14:sldIdLst>
             <p14:sldId id="261"/>
             <p14:sldId id="262"/>
           </p14:sldIdLst>
         </p14:section>
-        <p14:section name="Teach" id="{44a0df74-d619-e3ba-4166-42c5be2b6f14}">
+        <p14:section name="Teach" id="{e8def610-1ac5-c97a-533d-98e56ed894f3}">
           <p14:sldIdLst>
             <p14:sldId id="263"/>
             <p14:sldId id="264"/>
@@ -158,18 +158,18 @@
             <p14:sldId id="268"/>
           </p14:sldIdLst>
         </p14:section>
-        <p14:section name="Routes" id="{ac6c4865-54c6-ba89-4410-c883987929fd}">
+        <p14:section name="Routes" id="{5615135d-380e-0ea6-9a9f-1aa79659e353}">
           <p14:sldIdLst>
             <p14:sldId id="269"/>
             <p14:sldId id="270"/>
           </p14:sldIdLst>
         </p14:section>
-        <p14:section name="Close" id="{2af89900-7ae9-ed75-b224-06f9bd92d741}">
+        <p14:section name="Close" id="{8c3c0617-9176-ac04-e7a3-f4e386c5b4cd}">
           <p14:sldIdLst>
             <p14:sldId id="271"/>
           </p14:sldIdLst>
         </p14:section>
-        <p14:section name="Answers" id="{c8f2d333-0868-1bbf-3543-d003f4e4f5e8}">
+        <p14:section name="Answers" id="{93f76628-d1df-2f09-197a-6b343a235bc5}">
           <p14:sldIdLst>
             <p14:sldId id="272"/>
             <p14:sldId id="273"/>
